--- a/benchmarks/osworld/results/agent_computer_sonnet5/a669ef01-ded5-4099-9ea9-25e99b569840/run_1/Writing-Outlines.pptx
+++ b/benchmarks/osworld/results/agent_computer_sonnet5/a669ef01-ded5-4099-9ea9-25e99b569840/run_1/Writing-Outlines.pptx
@@ -305,7 +305,7 @@
             <a:pPr algn="r">
               <a:buNone/>
             </a:pPr>
-            <a:fld id="{F3EB9398-E909-4749-9507-C7C8D6991885}" type="slidenum">
+            <a:fld id="{3D973B00-C174-4776-B2C2-36401EAEB06E}" type="slidenum">
               <a:rPr b="0" lang="en-US" sz="1400" spc="-1" strike="noStrike">
                 <a:latin typeface="Times New Roman"/>
               </a:rPr>
@@ -1022,7 +1022,7 @@
         <p:txBody>
           <a:bodyPr/>
           <a:p>
-            <a:fld id="{26901773-B664-4EBD-8EA4-82267BFF4E1A}" type="slidenum">
+            <a:fld id="{B20E8774-024D-48A6-BFA2-5B751446376F}" type="slidenum">
               <a:t>&lt;#&gt;</a:t>
             </a:fld>
           </a:p>
@@ -1169,7 +1169,7 @@
         <p:txBody>
           <a:bodyPr/>
           <a:p>
-            <a:fld id="{86DEF1C4-8543-46AB-B186-253E3C9C25CF}" type="slidenum">
+            <a:fld id="{3E34BA28-63E2-4DE5-A159-984C72D8E08D}" type="slidenum">
               <a:t>&lt;#&gt;</a:t>
             </a:fld>
           </a:p>
@@ -1384,7 +1384,7 @@
         <p:txBody>
           <a:bodyPr/>
           <a:p>
-            <a:fld id="{3325CFC0-7A20-41E8-977A-89C4F3A87B03}" type="slidenum">
+            <a:fld id="{7462F9C5-8517-457F-AF59-B1D704452111}" type="slidenum">
               <a:t>&lt;#&gt;</a:t>
             </a:fld>
           </a:p>
@@ -1667,7 +1667,7 @@
         <p:txBody>
           <a:bodyPr/>
           <a:p>
-            <a:fld id="{38E3ADF4-D89B-48F6-8423-873F8F5CBE9F}" type="slidenum">
+            <a:fld id="{DED516F9-0282-4310-AFE0-BF5AD3EE7E26}" type="slidenum">
               <a:t>&lt;#&gt;</a:t>
             </a:fld>
           </a:p>
@@ -1709,7 +1709,7 @@
         <p:txBody>
           <a:bodyPr/>
           <a:p>
-            <a:fld id="{78B77835-C393-4190-A0AF-9A4662F3D490}" type="slidenum">
+            <a:fld id="{4B0C996D-CD62-414D-A7E6-D2784B2571BB}" type="slidenum">
               <a:t>&lt;#&gt;</a:t>
             </a:fld>
           </a:p>
@@ -1825,7 +1825,7 @@
         <p:txBody>
           <a:bodyPr/>
           <a:p>
-            <a:fld id="{42BA2BD0-183F-484E-B54C-1FA9C679C597}" type="slidenum">
+            <a:fld id="{AC4E28E2-E654-4A0F-A0EC-5A8662DC3AF5}" type="slidenum">
               <a:t>&lt;#&gt;</a:t>
             </a:fld>
           </a:p>
@@ -1938,7 +1938,7 @@
         <p:txBody>
           <a:bodyPr/>
           <a:p>
-            <a:fld id="{FFDB5788-5EDD-4E3D-ABA2-CACE57936B30}" type="slidenum">
+            <a:fld id="{39663639-1244-4F98-A37C-7F0D6D064836}" type="slidenum">
               <a:t>&lt;#&gt;</a:t>
             </a:fld>
           </a:p>
@@ -2085,7 +2085,7 @@
         <p:txBody>
           <a:bodyPr/>
           <a:p>
-            <a:fld id="{E83C5DBA-4DB5-48B1-853C-22143A231341}" type="slidenum">
+            <a:fld id="{89FC6B88-3F41-410A-A32B-FAED55609393}" type="slidenum">
               <a:t>&lt;#&gt;</a:t>
             </a:fld>
           </a:p>
@@ -2164,7 +2164,7 @@
         <p:txBody>
           <a:bodyPr/>
           <a:p>
-            <a:fld id="{5FBF9355-FC90-47F2-B3B2-16AF3195C0D6}" type="slidenum">
+            <a:fld id="{6A7C952D-4EF8-4630-959E-12389A42E588}" type="slidenum">
               <a:t>&lt;#&gt;</a:t>
             </a:fld>
           </a:p>
@@ -2243,7 +2243,7 @@
         <p:txBody>
           <a:bodyPr/>
           <a:p>
-            <a:fld id="{32253C47-9A22-46D3-B966-766D1AB47103}" type="slidenum">
+            <a:fld id="{722F914A-E3D6-4208-89F6-071908951E58}" type="slidenum">
               <a:t>&lt;#&gt;</a:t>
             </a:fld>
           </a:p>
@@ -2424,7 +2424,7 @@
         <p:txBody>
           <a:bodyPr/>
           <a:p>
-            <a:fld id="{DBDAF97F-B874-477D-A4E5-53F122DDF37C}" type="slidenum">
+            <a:fld id="{CF718C3B-925D-4D1C-9FF7-906D26B61124}" type="slidenum">
               <a:t>&lt;#&gt;</a:t>
             </a:fld>
           </a:p>
@@ -2540,7 +2540,7 @@
         <p:txBody>
           <a:bodyPr/>
           <a:p>
-            <a:fld id="{9A741370-6B5C-49FA-9E82-ABA818957A9A}" type="slidenum">
+            <a:fld id="{BB5A1E46-96FF-4E32-B2D7-70844E9F608B}" type="slidenum">
               <a:t>&lt;#&gt;</a:t>
             </a:fld>
           </a:p>
@@ -2721,7 +2721,7 @@
         <p:txBody>
           <a:bodyPr/>
           <a:p>
-            <a:fld id="{5A581D17-F395-4E55-B96D-62A5BA94CB84}" type="slidenum">
+            <a:fld id="{ED478E4F-2EE4-4C29-81C9-C1BC1E1A51F1}" type="slidenum">
               <a:t>&lt;#&gt;</a:t>
             </a:fld>
           </a:p>
@@ -2902,7 +2902,7 @@
         <p:txBody>
           <a:bodyPr/>
           <a:p>
-            <a:fld id="{55215F02-C4DE-495E-9B4A-842743803950}" type="slidenum">
+            <a:fld id="{745DF06B-A9F9-47F3-A7E4-CA5CB34468C8}" type="slidenum">
               <a:t>&lt;#&gt;</a:t>
             </a:fld>
           </a:p>
@@ -3049,7 +3049,7 @@
         <p:txBody>
           <a:bodyPr/>
           <a:p>
-            <a:fld id="{DBA763E7-0A0E-4E06-93EA-8E2C89069781}" type="slidenum">
+            <a:fld id="{E480DF07-0E6B-4542-987A-95C348AB6B49}" type="slidenum">
               <a:t>&lt;#&gt;</a:t>
             </a:fld>
           </a:p>
@@ -3264,7 +3264,7 @@
         <p:txBody>
           <a:bodyPr/>
           <a:p>
-            <a:fld id="{7F9F3BD1-3633-4B4A-9F43-F1441B58A4CC}" type="slidenum">
+            <a:fld id="{4A2B06D1-BE23-46D4-AAF8-B44B0011A9A4}" type="slidenum">
               <a:t>&lt;#&gt;</a:t>
             </a:fld>
           </a:p>
@@ -3547,7 +3547,7 @@
         <p:txBody>
           <a:bodyPr/>
           <a:p>
-            <a:fld id="{53BC6AE7-0957-485B-B0DC-47347816ACF5}" type="slidenum">
+            <a:fld id="{028768F1-203A-4A78-8B60-1A11D20E7CCE}" type="slidenum">
               <a:t>&lt;#&gt;</a:t>
             </a:fld>
           </a:p>
@@ -3609,7 +3609,7 @@
         <p:txBody>
           <a:bodyPr/>
           <a:p>
-            <a:fld id="{BC8AA267-11AC-4E8F-A8CE-1F0614479A0D}" type="slidenum">
+            <a:fld id="{DD74087F-18EE-4C83-890B-A08E51FB7725}" type="slidenum">
               <a:t>&lt;#&gt;</a:t>
             </a:fld>
           </a:p>
@@ -3766,7 +3766,7 @@
         <p:txBody>
           <a:bodyPr/>
           <a:p>
-            <a:fld id="{6F587509-4AA6-4E68-97EA-443E1D120BE4}" type="slidenum">
+            <a:fld id="{9529746A-71E0-4076-ABB5-D9A64534346D}" type="slidenum">
               <a:t>&lt;#&gt;</a:t>
             </a:fld>
           </a:p>
@@ -3920,7 +3920,7 @@
         <p:txBody>
           <a:bodyPr/>
           <a:p>
-            <a:fld id="{BEB4B058-1155-44EF-94D0-D6C1678A10B6}" type="slidenum">
+            <a:fld id="{FC78F067-FAC5-464B-A588-B9D94B7F9CDD}" type="slidenum">
               <a:t>&lt;#&gt;</a:t>
             </a:fld>
           </a:p>
@@ -4108,7 +4108,7 @@
         <p:txBody>
           <a:bodyPr/>
           <a:p>
-            <a:fld id="{A5B06660-739B-45D4-943D-0FD730FA15AF}" type="slidenum">
+            <a:fld id="{44518227-406E-47F2-BEC7-1FE483BA6367}" type="slidenum">
               <a:t>&lt;#&gt;</a:t>
             </a:fld>
           </a:p>
@@ -4228,7 +4228,7 @@
         <p:txBody>
           <a:bodyPr/>
           <a:p>
-            <a:fld id="{65D642BA-46E2-438F-A9CD-E5A750D1CF31}" type="slidenum">
+            <a:fld id="{BA7C3CBF-C9B7-438A-900E-E1C816BC3781}" type="slidenum">
               <a:t>&lt;#&gt;</a:t>
             </a:fld>
           </a:p>
@@ -4362,7 +4362,7 @@
         <p:txBody>
           <a:bodyPr/>
           <a:p>
-            <a:fld id="{8635DA76-E1A1-4DD3-87A2-3DC1FFAC3D3B}" type="slidenum">
+            <a:fld id="{AC9B0A99-51C6-4733-8E5A-52C04CF34299}" type="slidenum">
               <a:t>&lt;#&gt;</a:t>
             </a:fld>
           </a:p>
@@ -4461,7 +4461,7 @@
         <p:txBody>
           <a:bodyPr/>
           <a:p>
-            <a:fld id="{39442552-5686-4CBF-87ED-80631C87D914}" type="slidenum">
+            <a:fld id="{10B54238-D2C5-4F1B-AC11-49A801CE09F0}" type="slidenum">
               <a:t>&lt;#&gt;</a:t>
             </a:fld>
           </a:p>
@@ -4683,7 +4683,7 @@
         <p:txBody>
           <a:bodyPr/>
           <a:p>
-            <a:fld id="{949EA7D3-89E4-4586-BB1F-2CA12CF53728}" type="slidenum">
+            <a:fld id="{F99D67E2-9051-4BA5-AFE5-33D00B040219}" type="slidenum">
               <a:t>&lt;#&gt;</a:t>
             </a:fld>
           </a:p>
@@ -4905,7 +4905,7 @@
         <p:txBody>
           <a:bodyPr/>
           <a:p>
-            <a:fld id="{1DB5C2CD-881B-4B61-A140-ABBC4261FB5B}" type="slidenum">
+            <a:fld id="{F2333706-BE52-4764-AFCC-B37A050D7A8B}" type="slidenum">
               <a:t>&lt;#&gt;</a:t>
             </a:fld>
           </a:p>
@@ -5127,7 +5127,7 @@
         <p:txBody>
           <a:bodyPr/>
           <a:p>
-            <a:fld id="{D1D9AA40-95F7-425D-A17D-DABF05BF6CC9}" type="slidenum">
+            <a:fld id="{C19B4CCA-8DD9-4ABF-8699-07433982F4AA}" type="slidenum">
               <a:t>&lt;#&gt;</a:t>
             </a:fld>
           </a:p>
@@ -5315,7 +5315,7 @@
         <p:txBody>
           <a:bodyPr/>
           <a:p>
-            <a:fld id="{6D7AE044-AC2E-4916-B5F5-A28914838E37}" type="slidenum">
+            <a:fld id="{B650BDA9-AC5A-4B31-ADD6-52D6B397F52F}" type="slidenum">
               <a:t>&lt;#&gt;</a:t>
             </a:fld>
           </a:p>
@@ -5571,7 +5571,7 @@
         <p:txBody>
           <a:bodyPr/>
           <a:p>
-            <a:fld id="{9F873C95-D0E5-4754-9658-68CB88540C41}" type="slidenum">
+            <a:fld id="{2DBB6F1A-C4CC-4E1C-8087-7824D7532B9A}" type="slidenum">
               <a:t>&lt;#&gt;</a:t>
             </a:fld>
           </a:p>
@@ -5895,7 +5895,7 @@
         <p:txBody>
           <a:bodyPr/>
           <a:p>
-            <a:fld id="{78C41F78-B649-45D5-8F1E-28C1167C6481}" type="slidenum">
+            <a:fld id="{2B55DE11-7463-4C96-AE74-9F8021F91618}" type="slidenum">
               <a:t>&lt;#&gt;</a:t>
             </a:fld>
           </a:p>
@@ -5958,7 +5958,7 @@
         <p:txBody>
           <a:bodyPr/>
           <a:p>
-            <a:fld id="{6C01CDA3-C628-4D63-A67B-895A7B183834}" type="slidenum">
+            <a:fld id="{FE281EF7-34EB-4F42-A23C-15B0CDFA0A43}" type="slidenum">
               <a:t>&lt;#&gt;</a:t>
             </a:fld>
           </a:p>
@@ -6074,7 +6074,7 @@
         <p:txBody>
           <a:bodyPr/>
           <a:p>
-            <a:fld id="{3DD4B788-6249-41EF-92B2-32D3E08ECAA7}" type="slidenum">
+            <a:fld id="{56F6EF5F-EE98-47F5-8C16-E575F9FD1F0B}" type="slidenum">
               <a:t>&lt;#&gt;</a:t>
             </a:fld>
           </a:p>
@@ -6187,7 +6187,7 @@
         <p:txBody>
           <a:bodyPr/>
           <a:p>
-            <a:fld id="{4D5435C9-9557-45FE-824C-B73ADC6A4DD9}" type="slidenum">
+            <a:fld id="{D60564D3-53D5-4203-93B3-203A829DC019}" type="slidenum">
               <a:t>&lt;#&gt;</a:t>
             </a:fld>
           </a:p>
@@ -6334,7 +6334,7 @@
         <p:txBody>
           <a:bodyPr/>
           <a:p>
-            <a:fld id="{9D046393-999D-47AC-8183-7CD5409962DB}" type="slidenum">
+            <a:fld id="{2CE469E9-4B8D-4C15-B721-574B91DE645A}" type="slidenum">
               <a:t>&lt;#&gt;</a:t>
             </a:fld>
           </a:p>
@@ -6481,7 +6481,7 @@
         <p:txBody>
           <a:bodyPr/>
           <a:p>
-            <a:fld id="{21975B64-4A7F-4E49-A316-D3DA3BB679B5}" type="slidenum">
+            <a:fld id="{D99FC41A-DA57-4A51-85A7-5752967AE56C}" type="slidenum">
               <a:t>&lt;#&gt;</a:t>
             </a:fld>
           </a:p>
@@ -6560,7 +6560,7 @@
         <p:txBody>
           <a:bodyPr/>
           <a:p>
-            <a:fld id="{C643C08E-6F19-44E5-8DB9-D79A5939BFAF}" type="slidenum">
+            <a:fld id="{5EA00210-5309-4641-888E-12E48190FD8F}" type="slidenum">
               <a:t>&lt;#&gt;</a:t>
             </a:fld>
           </a:p>
@@ -6639,7 +6639,7 @@
         <p:txBody>
           <a:bodyPr/>
           <a:p>
-            <a:fld id="{34A612A6-AE81-41D3-A427-208FEFBF3F64}" type="slidenum">
+            <a:fld id="{249F1809-8905-4541-A8E9-8431EB077D7D}" type="slidenum">
               <a:t>&lt;#&gt;</a:t>
             </a:fld>
           </a:p>
@@ -6820,7 +6820,7 @@
         <p:txBody>
           <a:bodyPr/>
           <a:p>
-            <a:fld id="{8D8E38B3-D8ED-426B-96DF-957CB359FD56}" type="slidenum">
+            <a:fld id="{40B031D4-3A1A-4198-AB86-A2C47C801865}" type="slidenum">
               <a:t>&lt;#&gt;</a:t>
             </a:fld>
           </a:p>
@@ -7001,7 +7001,7 @@
         <p:txBody>
           <a:bodyPr/>
           <a:p>
-            <a:fld id="{C5689474-6197-4B9A-8E24-B46DF1217A6A}" type="slidenum">
+            <a:fld id="{2B8EF8C1-6DA2-4EB7-AE58-A5B8DC59A5D1}" type="slidenum">
               <a:t>&lt;#&gt;</a:t>
             </a:fld>
           </a:p>
@@ -7182,7 +7182,7 @@
         <p:txBody>
           <a:bodyPr/>
           <a:p>
-            <a:fld id="{B30A1C0D-A6C0-474F-AD53-49784612DA6B}" type="slidenum">
+            <a:fld id="{661E8BCF-BD65-4317-8DC4-163A9754F527}" type="slidenum">
               <a:t>&lt;#&gt;</a:t>
             </a:fld>
           </a:p>
@@ -7329,7 +7329,7 @@
         <p:txBody>
           <a:bodyPr/>
           <a:p>
-            <a:fld id="{62E71836-E5E5-4221-98C8-2CB7D0026856}" type="slidenum">
+            <a:fld id="{F8D3A0FE-C802-46AC-ABF4-83F1F8628316}" type="slidenum">
               <a:t>&lt;#&gt;</a:t>
             </a:fld>
           </a:p>
@@ -7544,7 +7544,7 @@
         <p:txBody>
           <a:bodyPr/>
           <a:p>
-            <a:fld id="{F9B3BF36-2338-4F8F-8F8E-9A8716F14C0D}" type="slidenum">
+            <a:fld id="{F889DBD9-7017-490D-9823-AAAC0AE8600A}" type="slidenum">
               <a:t>&lt;#&gt;</a:t>
             </a:fld>
           </a:p>
@@ -7827,7 +7827,7 @@
         <p:txBody>
           <a:bodyPr/>
           <a:p>
-            <a:fld id="{B6EAA8B9-F106-4767-8579-9C303F4A5D43}" type="slidenum">
+            <a:fld id="{41A96ED1-CD84-4C16-96FC-C849446BB88D}" type="slidenum">
               <a:t>&lt;#&gt;</a:t>
             </a:fld>
           </a:p>
@@ -7889,7 +7889,7 @@
         <p:txBody>
           <a:bodyPr/>
           <a:p>
-            <a:fld id="{31067BD0-5156-460D-A953-FCDE34F94578}" type="slidenum">
+            <a:fld id="{2A50411B-ACCA-4202-BA6D-01CB924445A9}" type="slidenum">
               <a:t>&lt;#&gt;</a:t>
             </a:fld>
           </a:p>
@@ -7989,7 +7989,7 @@
         <p:txBody>
           <a:bodyPr/>
           <a:p>
-            <a:fld id="{3A9B505B-1236-494B-95BB-D67F653AB13C}" type="slidenum">
+            <a:fld id="{EAA33742-A863-4FE6-8972-815190BC7DB9}" type="slidenum">
               <a:t>&lt;#&gt;</a:t>
             </a:fld>
           </a:p>
@@ -8125,7 +8125,7 @@
         <p:txBody>
           <a:bodyPr/>
           <a:p>
-            <a:fld id="{4A947B72-39A2-45FB-BCDE-69D46EDF6FAE}" type="slidenum">
+            <a:fld id="{097E9E97-C29D-473B-B988-34C9DF8765D3}" type="slidenum">
               <a:t>&lt;#&gt;</a:t>
             </a:fld>
           </a:p>
@@ -8279,7 +8279,7 @@
         <p:txBody>
           <a:bodyPr/>
           <a:p>
-            <a:fld id="{720A3CB0-3B53-4C3A-9425-ED0BDA9C00AA}" type="slidenum">
+            <a:fld id="{A29CF08D-E9D0-4966-A80E-82F3ABF265EB}" type="slidenum">
               <a:t>&lt;#&gt;</a:t>
             </a:fld>
           </a:p>
@@ -8467,7 +8467,7 @@
         <p:txBody>
           <a:bodyPr/>
           <a:p>
-            <a:fld id="{893CBBEA-4B51-4F51-8C65-ACBB5EE10AE9}" type="slidenum">
+            <a:fld id="{16CB3751-1362-4EF1-B066-1C8DD121933D}" type="slidenum">
               <a:t>&lt;#&gt;</a:t>
             </a:fld>
           </a:p>
@@ -8587,7 +8587,7 @@
         <p:txBody>
           <a:bodyPr/>
           <a:p>
-            <a:fld id="{598D67E5-367E-4770-BC82-69EB5A53ED57}" type="slidenum">
+            <a:fld id="{37D28209-314B-467B-AF36-464BDB315964}" type="slidenum">
               <a:t>&lt;#&gt;</a:t>
             </a:fld>
           </a:p>
@@ -8707,7 +8707,7 @@
         <p:txBody>
           <a:bodyPr/>
           <a:p>
-            <a:fld id="{FA2C037C-645E-4C92-9687-B4C5EBE53FA9}" type="slidenum">
+            <a:fld id="{CF65BA66-EB97-4B1F-B158-1590B7A757D5}" type="slidenum">
               <a:t>&lt;#&gt;</a:t>
             </a:fld>
           </a:p>
@@ -8929,7 +8929,7 @@
         <p:txBody>
           <a:bodyPr/>
           <a:p>
-            <a:fld id="{263DA70A-D7A6-4EF5-B571-BC27BB416863}" type="slidenum">
+            <a:fld id="{C99436A5-016D-41AB-B2A1-7FD04B7910A9}" type="slidenum">
               <a:t>&lt;#&gt;</a:t>
             </a:fld>
           </a:p>
@@ -9151,7 +9151,7 @@
         <p:txBody>
           <a:bodyPr/>
           <a:p>
-            <a:fld id="{44642C19-6974-4ADC-9CCD-6F620C1C3A96}" type="slidenum">
+            <a:fld id="{C2BC14A8-7DE9-4B47-9D39-56EFC60C9F11}" type="slidenum">
               <a:t>&lt;#&gt;</a:t>
             </a:fld>
           </a:p>
@@ -9373,7 +9373,7 @@
         <p:txBody>
           <a:bodyPr/>
           <a:p>
-            <a:fld id="{0B68B807-449E-4B33-8E63-F62FCE0B7742}" type="slidenum">
+            <a:fld id="{4E793F90-6FA2-4B8F-B2F5-3CDA67012CBA}" type="slidenum">
               <a:t>&lt;#&gt;</a:t>
             </a:fld>
           </a:p>
@@ -9561,7 +9561,7 @@
         <p:txBody>
           <a:bodyPr/>
           <a:p>
-            <a:fld id="{16E5D32B-BFCD-444E-AE6D-7B51922D5D77}" type="slidenum">
+            <a:fld id="{B4096CB8-48A2-400F-84F4-2087F4CADB87}" type="slidenum">
               <a:t>&lt;#&gt;</a:t>
             </a:fld>
           </a:p>
@@ -9817,7 +9817,7 @@
         <p:txBody>
           <a:bodyPr/>
           <a:p>
-            <a:fld id="{9537760C-4926-49B1-9D6A-35173CEED01B}" type="slidenum">
+            <a:fld id="{F357C394-8C6C-446A-B174-C522ACF261C8}" type="slidenum">
               <a:t>&lt;#&gt;</a:t>
             </a:fld>
           </a:p>
@@ -9917,7 +9917,7 @@
         <p:txBody>
           <a:bodyPr/>
           <a:p>
-            <a:fld id="{630E9490-D9F1-4AB8-9667-379106DBBEA8}" type="slidenum">
+            <a:fld id="{F1D63111-59C7-44DF-BC53-459DA7C6A755}" type="slidenum">
               <a:t>&lt;#&gt;</a:t>
             </a:fld>
           </a:p>
@@ -10220,7 +10220,7 @@
         <p:txBody>
           <a:bodyPr/>
           <a:p>
-            <a:fld id="{F8124E0F-7E62-405D-8695-58B9B0F46AD1}" type="slidenum">
+            <a:fld id="{B3E176ED-B42C-44E6-B11E-998C422AED2E}" type="slidenum">
               <a:t>&lt;#&gt;</a:t>
             </a:fld>
           </a:p>
@@ -10422,7 +10422,7 @@
         <p:txBody>
           <a:bodyPr/>
           <a:p>
-            <a:fld id="{E7EBEBFA-0BAF-4997-9E97-7CA77E711105}" type="slidenum">
+            <a:fld id="{58D21B9F-7725-493D-A39F-7811C00159A8}" type="slidenum">
               <a:t>&lt;#&gt;</a:t>
             </a:fld>
           </a:p>
@@ -10603,7 +10603,7 @@
         <p:txBody>
           <a:bodyPr/>
           <a:p>
-            <a:fld id="{E8FE8E72-593E-4995-8BEF-986B1E11E3E3}" type="slidenum">
+            <a:fld id="{69C571E2-0B5D-4561-AE50-7DD76DC451FF}" type="slidenum">
               <a:t>&lt;#&gt;</a:t>
             </a:fld>
           </a:p>
@@ -10784,7 +10784,7 @@
         <p:txBody>
           <a:bodyPr/>
           <a:p>
-            <a:fld id="{2C98D4A0-0AD3-415C-A86D-61D6EE36935E}" type="slidenum">
+            <a:fld id="{F78E66AB-F765-40F9-9981-6F2F9EE3EE95}" type="slidenum">
               <a:t>&lt;#&gt;</a:t>
             </a:fld>
           </a:p>
@@ -11029,7 +11029,7 @@
                 <a:tab algn="l" pos="0"/>
               </a:tabLst>
             </a:pPr>
-            <a:fld id="{481FAD89-FE45-41C5-9231-74AD4E75D3E6}" type="slidenum">
+            <a:fld id="{B99E5E31-C593-40A9-A915-A5075A711440}" type="slidenum">
               <a:rPr b="0" lang="en" sz="1000" spc="-1" strike="noStrike">
                 <a:solidFill>
                   <a:srgbClr val="ffffff"/>
@@ -11440,7 +11440,7 @@
                 <a:tab algn="l" pos="0"/>
               </a:tabLst>
             </a:pPr>
-            <a:fld id="{B8F73719-5DD3-4817-A60B-1647574D6E38}" type="slidenum">
+            <a:fld id="{7EC0BF99-8F5A-4539-83D4-382114143F05}" type="slidenum">
               <a:rPr b="0" lang="en" sz="1000" spc="-1" strike="noStrike">
                 <a:solidFill>
                   <a:srgbClr val="ffffff"/>
@@ -11884,7 +11884,7 @@
                 <a:tab algn="l" pos="0"/>
               </a:tabLst>
             </a:pPr>
-            <a:fld id="{D6BED282-3C1E-4CBF-97C6-3FAA4727B57B}" type="slidenum">
+            <a:fld id="{FAA28CB0-805A-4DBB-A479-18E50BFE60DB}" type="slidenum">
               <a:rPr b="0" lang="en" sz="1800" spc="-1" strike="noStrike">
                 <a:solidFill>
                   <a:srgbClr val="000000"/>
@@ -12427,7 +12427,7 @@
                 <a:tab algn="l" pos="0"/>
               </a:tabLst>
             </a:pPr>
-            <a:fld id="{36E6CC2E-D200-4084-ADCC-DF04A54A6968}" type="slidenum">
+            <a:fld id="{D3110D1C-D58D-4419-9DD1-E4B87ABD8830}" type="slidenum">
               <a:rPr b="0" lang="en" sz="1000" spc="-1" strike="noStrike">
                 <a:solidFill>
                   <a:srgbClr val="ffffff"/>
@@ -13277,7 +13277,7 @@
                 <a:tab algn="l" pos="0"/>
               </a:tabLst>
             </a:pPr>
-            <a:fld id="{63A97811-6FEE-4DCF-AA72-907FF5E5BB35}" type="slidenum">
+            <a:fld id="{D4A7A227-191A-4C58-B303-1C8D7ECAAA98}" type="slidenum">
               <a:rPr b="0" lang="en" sz="1800" spc="-1" strike="noStrike">
                 <a:solidFill>
                   <a:srgbClr val="000000"/>
@@ -14931,11 +14931,25 @@
               <a:latin typeface="Arial"/>
             </a:endParaRPr>
           </a:p>
+          <a:p>
+            <a:pPr>
+              <a:lnSpc>
+                <a:spcPct val="100000"/>
+              </a:lnSpc>
+              <a:buNone/>
+              <a:tabLst>
+                <a:tab algn="l" pos="0"/>
+              </a:tabLst>
+            </a:pPr>
+            <a:endParaRPr b="0" lang="en-US" sz="3200" spc="-1" strike="noStrike">
+              <a:latin typeface="Arial"/>
+            </a:endParaRPr>
+          </a:p>
         </p:txBody>
       </p:sp>
       <p:pic>
         <p:nvPicPr>
-          <p:cNvPr id="246" name="Google Shape;434;p 1" descr=""/>
+          <p:cNvPr id="246" name="Google Shape;434;p3" descr=""/>
           <p:cNvPicPr/>
           <p:nvPr/>
         </p:nvPicPr>
